--- a/presentaciones/Cap03_El-delincuente.pptx
+++ b/presentaciones/Cap03_El-delincuente.pptx
@@ -13640,7 +13640,7 @@
       </p:sp>
       <p:pic>
         <p:nvPicPr>
-          <p:cNvPr id="4" name="Image 0" descr="/sessions/clever-modest-cray/mnt/intro_crimi/presentaciones/.cache-imagenes/garridopsicopatas.png">    </p:cNvPr>
+          <p:cNvPr id="4" name="Image 0" descr="/sessions/clever-modest-cray/mnt/intro_crimi/presentaciones/.cache-imagenes/garridopsicopatas.jpg">    </p:cNvPr>
           <p:cNvPicPr>
             <a:picLocks noChangeAspect="1"/>
           </p:cNvPicPr>
@@ -16823,7 +16823,7 @@
       </p:sp>
       <p:pic>
         <p:nvPicPr>
-          <p:cNvPr id="5" name="Image 0" descr="/sessions/clever-modest-cray/mnt/intro_crimi/presentaciones/.cache-imagenes/psycopathy.png">    </p:cNvPr>
+          <p:cNvPr id="5" name="Image 0" descr="/sessions/clever-modest-cray/mnt/intro_crimi/presentaciones/.cache-imagenes/psycopathy.jpg">    </p:cNvPr>
           <p:cNvPicPr>
             <a:picLocks noChangeAspect="1"/>
           </p:cNvPicPr>
@@ -23896,7 +23896,7 @@
       </p:sp>
       <p:pic>
         <p:nvPicPr>
-          <p:cNvPr id="5" name="Image 0" descr="/sessions/clever-modest-cray/mnt/intro_crimi/presentaciones/.cache-imagenes/hooton3.png">    </p:cNvPr>
+          <p:cNvPr id="5" name="Image 0" descr="/sessions/clever-modest-cray/mnt/intro_crimi/presentaciones/.cache-imagenes/hooton3.jpg">    </p:cNvPr>
           <p:cNvPicPr>
             <a:picLocks noChangeAspect="1"/>
           </p:cNvPicPr>

--- a/presentaciones/Cap03_El-delincuente.pptx
+++ b/presentaciones/Cap03_El-delincuente.pptx
@@ -5614,6 +5614,9 @@
           <a:lstStyle/>
           <a:p>
             <a:pPr indent="0" marL="0">
+              <a:lnSpc>
+                <a:spcPts val="3600"/>
+              </a:lnSpc>
               <a:buNone/>
             </a:pPr>
             <a:r>
@@ -5640,19 +5643,22 @@
         <p:spPr>
           <a:xfrm>
             <a:off x="868680" y="1298448"/>
-            <a:ext cx="10454335" cy="365760"/>
-          </a:xfrm>
-          <a:prstGeom prst="rect">
-            <a:avLst/>
-          </a:prstGeom>
-          <a:noFill/>
-          <a:ln/>
-        </p:spPr>
-        <p:txBody>
-          <a:bodyPr wrap="square" lIns="0" tIns="0" rIns="0" bIns="0" rtlCol="0" anchor="ctr"/>
-          <a:lstStyle/>
-          <a:p>
-            <a:pPr indent="0" marL="0">
+            <a:ext cx="10454335" cy="411480"/>
+          </a:xfrm>
+          <a:prstGeom prst="rect">
+            <a:avLst/>
+          </a:prstGeom>
+          <a:noFill/>
+          <a:ln/>
+        </p:spPr>
+        <p:txBody>
+          <a:bodyPr wrap="square" lIns="0" tIns="0" rIns="0" bIns="0" rtlCol="0" anchor="ctr"/>
+          <a:lstStyle/>
+          <a:p>
+            <a:pPr indent="0" marL="0">
+              <a:lnSpc>
+                <a:spcPts val="2000"/>
+              </a:lnSpc>
               <a:buNone/>
             </a:pPr>
             <a:r>
@@ -7104,6 +7110,9 @@
           <a:lstStyle/>
           <a:p>
             <a:pPr indent="0" marL="0">
+              <a:lnSpc>
+                <a:spcPts val="3600"/>
+              </a:lnSpc>
               <a:buNone/>
             </a:pPr>
             <a:r>
@@ -7130,19 +7139,22 @@
         <p:spPr>
           <a:xfrm>
             <a:off x="868680" y="1298448"/>
-            <a:ext cx="10454335" cy="365760"/>
-          </a:xfrm>
-          <a:prstGeom prst="rect">
-            <a:avLst/>
-          </a:prstGeom>
-          <a:noFill/>
-          <a:ln/>
-        </p:spPr>
-        <p:txBody>
-          <a:bodyPr wrap="square" lIns="0" tIns="0" rIns="0" bIns="0" rtlCol="0" anchor="ctr"/>
-          <a:lstStyle/>
-          <a:p>
-            <a:pPr indent="0" marL="0">
+            <a:ext cx="10454335" cy="411480"/>
+          </a:xfrm>
+          <a:prstGeom prst="rect">
+            <a:avLst/>
+          </a:prstGeom>
+          <a:noFill/>
+          <a:ln/>
+        </p:spPr>
+        <p:txBody>
+          <a:bodyPr wrap="square" lIns="0" tIns="0" rIns="0" bIns="0" rtlCol="0" anchor="ctr"/>
+          <a:lstStyle/>
+          <a:p>
+            <a:pPr indent="0" marL="0">
+              <a:lnSpc>
+                <a:spcPts val="2000"/>
+              </a:lnSpc>
               <a:buNone/>
             </a:pPr>
             <a:r>
@@ -7318,6 +7330,9 @@
           <a:lstStyle/>
           <a:p>
             <a:pPr indent="0" marL="0">
+              <a:lnSpc>
+                <a:spcPts val="3600"/>
+              </a:lnSpc>
               <a:buNone/>
             </a:pPr>
             <a:r>
@@ -7344,19 +7359,22 @@
         <p:spPr>
           <a:xfrm>
             <a:off x="868680" y="1298448"/>
-            <a:ext cx="10454335" cy="365760"/>
-          </a:xfrm>
-          <a:prstGeom prst="rect">
-            <a:avLst/>
-          </a:prstGeom>
-          <a:noFill/>
-          <a:ln/>
-        </p:spPr>
-        <p:txBody>
-          <a:bodyPr wrap="square" lIns="0" tIns="0" rIns="0" bIns="0" rtlCol="0" anchor="ctr"/>
-          <a:lstStyle/>
-          <a:p>
-            <a:pPr indent="0" marL="0">
+            <a:ext cx="10454335" cy="411480"/>
+          </a:xfrm>
+          <a:prstGeom prst="rect">
+            <a:avLst/>
+          </a:prstGeom>
+          <a:noFill/>
+          <a:ln/>
+        </p:spPr>
+        <p:txBody>
+          <a:bodyPr wrap="square" lIns="0" tIns="0" rIns="0" bIns="0" rtlCol="0" anchor="ctr"/>
+          <a:lstStyle/>
+          <a:p>
+            <a:pPr indent="0" marL="0">
+              <a:lnSpc>
+                <a:spcPts val="2000"/>
+              </a:lnSpc>
               <a:buNone/>
             </a:pPr>
             <a:r>
@@ -11495,6 +11513,9 @@
           <a:lstStyle/>
           <a:p>
             <a:pPr indent="0" marL="0">
+              <a:lnSpc>
+                <a:spcPts val="3600"/>
+              </a:lnSpc>
               <a:buNone/>
             </a:pPr>
             <a:r>
@@ -11521,19 +11542,22 @@
         <p:spPr>
           <a:xfrm>
             <a:off x="868680" y="1298448"/>
-            <a:ext cx="10454335" cy="365760"/>
-          </a:xfrm>
-          <a:prstGeom prst="rect">
-            <a:avLst/>
-          </a:prstGeom>
-          <a:noFill/>
-          <a:ln/>
-        </p:spPr>
-        <p:txBody>
-          <a:bodyPr wrap="square" lIns="0" tIns="0" rIns="0" bIns="0" rtlCol="0" anchor="ctr"/>
-          <a:lstStyle/>
-          <a:p>
-            <a:pPr indent="0" marL="0">
+            <a:ext cx="10454335" cy="411480"/>
+          </a:xfrm>
+          <a:prstGeom prst="rect">
+            <a:avLst/>
+          </a:prstGeom>
+          <a:noFill/>
+          <a:ln/>
+        </p:spPr>
+        <p:txBody>
+          <a:bodyPr wrap="square" lIns="0" tIns="0" rIns="0" bIns="0" rtlCol="0" anchor="ctr"/>
+          <a:lstStyle/>
+          <a:p>
+            <a:pPr indent="0" marL="0">
+              <a:lnSpc>
+                <a:spcPts val="2000"/>
+              </a:lnSpc>
               <a:buNone/>
             </a:pPr>
             <a:r>
@@ -13621,6 +13645,9 @@
           <a:lstStyle/>
           <a:p>
             <a:pPr indent="0" marL="0">
+              <a:lnSpc>
+                <a:spcPts val="3600"/>
+              </a:lnSpc>
               <a:buNone/>
             </a:pPr>
             <a:r>
@@ -14677,6 +14704,9 @@
           <a:lstStyle/>
           <a:p>
             <a:pPr indent="0" marL="0">
+              <a:lnSpc>
+                <a:spcPts val="3600"/>
+              </a:lnSpc>
               <a:buNone/>
             </a:pPr>
             <a:r>
@@ -14703,19 +14733,22 @@
         <p:spPr>
           <a:xfrm>
             <a:off x="868680" y="1298448"/>
-            <a:ext cx="10454335" cy="365760"/>
-          </a:xfrm>
-          <a:prstGeom prst="rect">
-            <a:avLst/>
-          </a:prstGeom>
-          <a:noFill/>
-          <a:ln/>
-        </p:spPr>
-        <p:txBody>
-          <a:bodyPr wrap="square" lIns="0" tIns="0" rIns="0" bIns="0" rtlCol="0" anchor="ctr"/>
-          <a:lstStyle/>
-          <a:p>
-            <a:pPr indent="0" marL="0">
+            <a:ext cx="10454335" cy="411480"/>
+          </a:xfrm>
+          <a:prstGeom prst="rect">
+            <a:avLst/>
+          </a:prstGeom>
+          <a:noFill/>
+          <a:ln/>
+        </p:spPr>
+        <p:txBody>
+          <a:bodyPr wrap="square" lIns="0" tIns="0" rIns="0" bIns="0" rtlCol="0" anchor="ctr"/>
+          <a:lstStyle/>
+          <a:p>
+            <a:pPr indent="0" marL="0">
+              <a:lnSpc>
+                <a:spcPts val="2000"/>
+              </a:lnSpc>
               <a:buNone/>
             </a:pPr>
             <a:r>
@@ -16765,6 +16798,9 @@
           <a:lstStyle/>
           <a:p>
             <a:pPr indent="0" marL="0">
+              <a:lnSpc>
+                <a:spcPts val="3600"/>
+              </a:lnSpc>
               <a:buNone/>
             </a:pPr>
             <a:r>
@@ -16791,19 +16827,22 @@
         <p:spPr>
           <a:xfrm>
             <a:off x="868680" y="1298448"/>
-            <a:ext cx="10454335" cy="365760"/>
-          </a:xfrm>
-          <a:prstGeom prst="rect">
-            <a:avLst/>
-          </a:prstGeom>
-          <a:noFill/>
-          <a:ln/>
-        </p:spPr>
-        <p:txBody>
-          <a:bodyPr wrap="square" lIns="0" tIns="0" rIns="0" bIns="0" rtlCol="0" anchor="ctr"/>
-          <a:lstStyle/>
-          <a:p>
-            <a:pPr indent="0" marL="0">
+            <a:ext cx="10454335" cy="411480"/>
+          </a:xfrm>
+          <a:prstGeom prst="rect">
+            <a:avLst/>
+          </a:prstGeom>
+          <a:noFill/>
+          <a:ln/>
+        </p:spPr>
+        <p:txBody>
+          <a:bodyPr wrap="square" lIns="0" tIns="0" rIns="0" bIns="0" rtlCol="0" anchor="ctr"/>
+          <a:lstStyle/>
+          <a:p>
+            <a:pPr indent="0" marL="0">
+              <a:lnSpc>
+                <a:spcPts val="2000"/>
+              </a:lnSpc>
               <a:buNone/>
             </a:pPr>
             <a:r>
@@ -23838,6 +23877,9 @@
           <a:lstStyle/>
           <a:p>
             <a:pPr indent="0" marL="0">
+              <a:lnSpc>
+                <a:spcPts val="3600"/>
+              </a:lnSpc>
               <a:buNone/>
             </a:pPr>
             <a:r>
@@ -23864,19 +23906,22 @@
         <p:spPr>
           <a:xfrm>
             <a:off x="868680" y="1298448"/>
-            <a:ext cx="10454335" cy="365760"/>
-          </a:xfrm>
-          <a:prstGeom prst="rect">
-            <a:avLst/>
-          </a:prstGeom>
-          <a:noFill/>
-          <a:ln/>
-        </p:spPr>
-        <p:txBody>
-          <a:bodyPr wrap="square" lIns="0" tIns="0" rIns="0" bIns="0" rtlCol="0" anchor="ctr"/>
-          <a:lstStyle/>
-          <a:p>
-            <a:pPr indent="0" marL="0">
+            <a:ext cx="10454335" cy="411480"/>
+          </a:xfrm>
+          <a:prstGeom prst="rect">
+            <a:avLst/>
+          </a:prstGeom>
+          <a:noFill/>
+          <a:ln/>
+        </p:spPr>
+        <p:txBody>
+          <a:bodyPr wrap="square" lIns="0" tIns="0" rIns="0" bIns="0" rtlCol="0" anchor="ctr"/>
+          <a:lstStyle/>
+          <a:p>
+            <a:pPr indent="0" marL="0">
+              <a:lnSpc>
+                <a:spcPts val="2000"/>
+              </a:lnSpc>
               <a:buNone/>
             </a:pPr>
             <a:r>

--- a/presentaciones/Cap03_El-delincuente.pptx
+++ b/presentaciones/Cap03_El-delincuente.pptx
@@ -6220,6 +6220,9 @@
           <a:lstStyle/>
           <a:p>
             <a:pPr indent="0" marL="0">
+              <a:lnSpc>
+                <a:spcPts val="4400"/>
+              </a:lnSpc>
               <a:buNone/>
             </a:pPr>
             <a:r>
@@ -7550,6 +7553,9 @@
           <a:lstStyle/>
           <a:p>
             <a:pPr indent="0" marL="0">
+              <a:lnSpc>
+                <a:spcPts val="4400"/>
+              </a:lnSpc>
               <a:buNone/>
             </a:pPr>
             <a:r>
@@ -8647,6 +8653,9 @@
           <a:lstStyle/>
           <a:p>
             <a:pPr indent="0" marL="0">
+              <a:lnSpc>
+                <a:spcPts val="4400"/>
+              </a:lnSpc>
               <a:buNone/>
             </a:pPr>
             <a:r>
@@ -11733,6 +11742,9 @@
           <a:lstStyle/>
           <a:p>
             <a:pPr indent="0" marL="0">
+              <a:lnSpc>
+                <a:spcPts val="4400"/>
+              </a:lnSpc>
               <a:buNone/>
             </a:pPr>
             <a:r>
@@ -13823,6 +13835,9 @@
           <a:lstStyle/>
           <a:p>
             <a:pPr indent="0" marL="0">
+              <a:lnSpc>
+                <a:spcPts val="4400"/>
+              </a:lnSpc>
               <a:buNone/>
             </a:pPr>
             <a:r>
@@ -15096,6 +15111,9 @@
           <a:lstStyle/>
           <a:p>
             <a:pPr indent="0" marL="0">
+              <a:lnSpc>
+                <a:spcPts val="4400"/>
+              </a:lnSpc>
               <a:buNone/>
             </a:pPr>
             <a:r>
@@ -15917,6 +15935,9 @@
           <a:lstStyle/>
           <a:p>
             <a:pPr indent="0" marL="0">
+              <a:lnSpc>
+                <a:spcPts val="4400"/>
+              </a:lnSpc>
               <a:buNone/>
             </a:pPr>
             <a:r>
@@ -17342,6 +17363,9 @@
           <a:lstStyle/>
           <a:p>
             <a:pPr indent="0" marL="0">
+              <a:lnSpc>
+                <a:spcPts val="4400"/>
+              </a:lnSpc>
               <a:buNone/>
             </a:pPr>
             <a:r>
@@ -18482,6 +18506,9 @@
           <a:lstStyle/>
           <a:p>
             <a:pPr indent="0" marL="0">
+              <a:lnSpc>
+                <a:spcPts val="4400"/>
+              </a:lnSpc>
               <a:buNone/>
             </a:pPr>
             <a:r>
@@ -20088,6 +20115,9 @@
           <a:lstStyle/>
           <a:p>
             <a:pPr indent="0" marL="0">
+              <a:lnSpc>
+                <a:spcPts val="4400"/>
+              </a:lnSpc>
               <a:buNone/>
             </a:pPr>
             <a:r>
@@ -21620,6 +21650,9 @@
           <a:lstStyle/>
           <a:p>
             <a:pPr indent="0" marL="0">
+              <a:lnSpc>
+                <a:spcPts val="4400"/>
+              </a:lnSpc>
               <a:buNone/>
             </a:pPr>
             <a:r>
@@ -23115,6 +23148,9 @@
           <a:lstStyle/>
           <a:p>
             <a:pPr indent="0" marL="0">
+              <a:lnSpc>
+                <a:spcPts val="4400"/>
+              </a:lnSpc>
               <a:buNone/>
             </a:pPr>
             <a:r>
